--- a/chapter6/parts/part-03-dispersion-shape-and-grouping/clip.pptx
+++ b/chapter6/parts/part-03-dispersion-shape-and-grouping/clip.pptx
@@ -4172,7 +4172,7 @@
               </a:defRPr>
             </a:pPr>
             <a:r>
-              <a:t>Chapter 6 — 03 Dispersion Shape And Grouping</a:t>
+              <a:t>Chapter 6 — Dispersion Shape And Grouping</a:t>
             </a:r>
           </a:p>
         </p:txBody>
@@ -4331,7 +4331,7 @@
               </a:defRPr>
             </a:pPr>
             <a:r>
-              <a:t>Chapter 6 — 03 Dispersion Shape And Grouping</a:t>
+              <a:t>Chapter 6 — Dispersion Shape And Grouping</a:t>
             </a:r>
           </a:p>
         </p:txBody>
@@ -4490,7 +4490,7 @@
               </a:defRPr>
             </a:pPr>
             <a:r>
-              <a:t>Chapter 6 — 03 Dispersion Shape And Grouping</a:t>
+              <a:t>Chapter 6 — Dispersion Shape And Grouping</a:t>
             </a:r>
           </a:p>
         </p:txBody>
@@ -4669,7 +4669,7 @@
               </a:defRPr>
             </a:pPr>
             <a:r>
-              <a:t>Chapter 6 — 03 Dispersion Shape And Grouping</a:t>
+              <a:t>Chapter 6 — Dispersion Shape And Grouping</a:t>
             </a:r>
           </a:p>
         </p:txBody>
@@ -4868,7 +4868,7 @@
               </a:defRPr>
             </a:pPr>
             <a:r>
-              <a:t>Chapter 6 — 03 Dispersion Shape And Grouping</a:t>
+              <a:t>Chapter 6 — Dispersion Shape And Grouping</a:t>
             </a:r>
           </a:p>
         </p:txBody>
@@ -5312,7 +5312,7 @@
               </a:defRPr>
             </a:pPr>
             <a:r>
-              <a:t>Chapter 6 — 03 Dispersion Shape And Grouping</a:t>
+              <a:t>Chapter 6 — Dispersion Shape And Grouping</a:t>
             </a:r>
           </a:p>
         </p:txBody>
@@ -5491,7 +5491,7 @@
               </a:defRPr>
             </a:pPr>
             <a:r>
-              <a:t>Chapter 6 — 03 Dispersion Shape And Grouping</a:t>
+              <a:t>Chapter 6 — Dispersion Shape And Grouping</a:t>
             </a:r>
           </a:p>
         </p:txBody>
@@ -5670,7 +5670,7 @@
               </a:defRPr>
             </a:pPr>
             <a:r>
-              <a:t>Chapter 6 — 03 Dispersion Shape And Grouping</a:t>
+              <a:t>Chapter 6 — Dispersion Shape And Grouping</a:t>
             </a:r>
           </a:p>
         </p:txBody>
@@ -5849,7 +5849,7 @@
               </a:defRPr>
             </a:pPr>
             <a:r>
-              <a:t>Chapter 6 — 03 Dispersion Shape And Grouping</a:t>
+              <a:t>Chapter 6 — Dispersion Shape And Grouping</a:t>
             </a:r>
           </a:p>
         </p:txBody>
@@ -6028,7 +6028,7 @@
               </a:defRPr>
             </a:pPr>
             <a:r>
-              <a:t>Chapter 6 — 03 Dispersion Shape And Grouping</a:t>
+              <a:t>Chapter 6 — Dispersion Shape And Grouping</a:t>
             </a:r>
           </a:p>
         </p:txBody>

--- a/chapter6/parts/part-03-dispersion-shape-and-grouping/clip.pptx
+++ b/chapter6/parts/part-03-dispersion-shape-and-grouping/clip.pptx
@@ -4256,10 +4256,12 @@
           </a:bodyPr>
           <a:lstStyle/>
           <a:p>
-            <a:pPr>
+            <a:pPr lvl="0" marL="457200" indent="-228600">
+              <a:buFont typeface="Calibri"/>
               <a:spcAft>
                 <a:spcPts val="1000"/>
               </a:spcAft>
+              <a:buSzPct val="100000"/>
               <a:buChar char="•"/>
               <a:lnSpc>
                 <a:spcPts val="2200"/>
@@ -4276,10 +4278,12 @@
             </a:r>
           </a:p>
           <a:p>
-            <a:pPr>
+            <a:pPr lvl="0" marL="457200" indent="-228600">
+              <a:buFont typeface="Calibri"/>
               <a:spcAft>
                 <a:spcPts val="1000"/>
               </a:spcAft>
+              <a:buSzPct val="100000"/>
               <a:buChar char="•"/>
               <a:lnSpc>
                 <a:spcPts val="2200"/>
@@ -4415,10 +4419,12 @@
           </a:bodyPr>
           <a:lstStyle/>
           <a:p>
-            <a:pPr>
+            <a:pPr lvl="0" marL="457200" indent="-228600">
+              <a:buFont typeface="Calibri"/>
               <a:spcAft>
                 <a:spcPts val="1000"/>
               </a:spcAft>
+              <a:buSzPct val="100000"/>
               <a:buChar char="•"/>
               <a:lnSpc>
                 <a:spcPts val="2200"/>
@@ -4435,10 +4441,12 @@
             </a:r>
           </a:p>
           <a:p>
-            <a:pPr>
+            <a:pPr lvl="0" marL="457200" indent="-228600">
+              <a:buFont typeface="Calibri"/>
               <a:spcAft>
                 <a:spcPts val="1000"/>
               </a:spcAft>
+              <a:buSzPct val="100000"/>
               <a:buChar char="•"/>
               <a:lnSpc>
                 <a:spcPts val="2200"/>
@@ -4574,10 +4582,12 @@
           </a:bodyPr>
           <a:lstStyle/>
           <a:p>
-            <a:pPr>
+            <a:pPr lvl="0" marL="457200" indent="-228600">
+              <a:buFont typeface="Calibri"/>
               <a:spcAft>
                 <a:spcPts val="1000"/>
               </a:spcAft>
+              <a:buSzPct val="100000"/>
               <a:buChar char="•"/>
               <a:lnSpc>
                 <a:spcPts val="2200"/>
@@ -4594,10 +4604,12 @@
             </a:r>
           </a:p>
           <a:p>
-            <a:pPr>
+            <a:pPr lvl="0" marL="457200" indent="-228600">
+              <a:buFont typeface="Calibri"/>
               <a:spcAft>
                 <a:spcPts val="1000"/>
               </a:spcAft>
+              <a:buSzPct val="100000"/>
               <a:buChar char="•"/>
               <a:lnSpc>
                 <a:spcPts val="2200"/>
@@ -4614,10 +4626,12 @@
             </a:r>
           </a:p>
           <a:p>
-            <a:pPr>
+            <a:pPr lvl="0" marL="457200" indent="-228600">
+              <a:buFont typeface="Calibri"/>
               <a:spcAft>
                 <a:spcPts val="1000"/>
               </a:spcAft>
+              <a:buSzPct val="100000"/>
               <a:buChar char="•"/>
               <a:lnSpc>
                 <a:spcPts val="2200"/>
@@ -4753,10 +4767,12 @@
           </a:bodyPr>
           <a:lstStyle/>
           <a:p>
-            <a:pPr>
+            <a:pPr lvl="0" marL="457200" indent="-228600">
+              <a:buFont typeface="Calibri"/>
               <a:spcAft>
                 <a:spcPts val="1000"/>
               </a:spcAft>
+              <a:buSzPct val="100000"/>
               <a:buChar char="•"/>
               <a:lnSpc>
                 <a:spcPts val="2200"/>
@@ -4773,10 +4789,12 @@
             </a:r>
           </a:p>
           <a:p>
-            <a:pPr>
+            <a:pPr lvl="0" marL="457200" indent="-228600">
+              <a:buFont typeface="Calibri"/>
               <a:spcAft>
                 <a:spcPts val="1000"/>
               </a:spcAft>
+              <a:buSzPct val="100000"/>
               <a:buChar char="•"/>
               <a:lnSpc>
                 <a:spcPts val="2200"/>
@@ -4793,10 +4811,12 @@
             </a:r>
           </a:p>
           <a:p>
-            <a:pPr>
+            <a:pPr lvl="0" marL="457200" indent="-228600">
+              <a:buFont typeface="Calibri"/>
               <a:spcAft>
                 <a:spcPts val="1000"/>
               </a:spcAft>
+              <a:buSzPct val="100000"/>
               <a:buChar char="•"/>
               <a:lnSpc>
                 <a:spcPts val="2200"/>
@@ -4813,10 +4833,12 @@
             </a:r>
           </a:p>
           <a:p>
-            <a:pPr>
+            <a:pPr lvl="0" marL="457200" indent="-228600">
+              <a:buFont typeface="Calibri"/>
               <a:spcAft>
                 <a:spcPts val="1000"/>
               </a:spcAft>
+              <a:buSzPct val="100000"/>
               <a:buChar char="•"/>
               <a:lnSpc>
                 <a:spcPts val="2200"/>
@@ -5396,10 +5418,12 @@
           </a:bodyPr>
           <a:lstStyle/>
           <a:p>
-            <a:pPr>
+            <a:pPr lvl="0" marL="457200" indent="-228600">
+              <a:buFont typeface="Calibri"/>
               <a:spcAft>
                 <a:spcPts val="1000"/>
               </a:spcAft>
+              <a:buSzPct val="100000"/>
               <a:buChar char="•"/>
               <a:lnSpc>
                 <a:spcPts val="2200"/>
@@ -5416,10 +5440,12 @@
             </a:r>
           </a:p>
           <a:p>
-            <a:pPr>
+            <a:pPr lvl="0" marL="457200" indent="-228600">
+              <a:buFont typeface="Calibri"/>
               <a:spcAft>
                 <a:spcPts val="1000"/>
               </a:spcAft>
+              <a:buSzPct val="100000"/>
               <a:buChar char="•"/>
               <a:lnSpc>
                 <a:spcPts val="2200"/>
@@ -5436,10 +5462,12 @@
             </a:r>
           </a:p>
           <a:p>
-            <a:pPr>
+            <a:pPr lvl="0" marL="457200" indent="-228600">
+              <a:buFont typeface="Calibri"/>
               <a:spcAft>
                 <a:spcPts val="1000"/>
               </a:spcAft>
+              <a:buSzPct val="100000"/>
               <a:buChar char="•"/>
               <a:lnSpc>
                 <a:spcPts val="2200"/>
@@ -5575,10 +5603,12 @@
           </a:bodyPr>
           <a:lstStyle/>
           <a:p>
-            <a:pPr>
+            <a:pPr lvl="0" marL="457200" indent="-228600">
+              <a:buFont typeface="Calibri"/>
               <a:spcAft>
                 <a:spcPts val="1000"/>
               </a:spcAft>
+              <a:buSzPct val="100000"/>
               <a:buChar char="•"/>
               <a:lnSpc>
                 <a:spcPts val="2200"/>
@@ -5595,10 +5625,12 @@
             </a:r>
           </a:p>
           <a:p>
-            <a:pPr>
+            <a:pPr lvl="0" marL="457200" indent="-228600">
+              <a:buFont typeface="Calibri"/>
               <a:spcAft>
                 <a:spcPts val="1000"/>
               </a:spcAft>
+              <a:buSzPct val="100000"/>
               <a:buChar char="•"/>
               <a:lnSpc>
                 <a:spcPts val="2200"/>
@@ -5615,10 +5647,12 @@
             </a:r>
           </a:p>
           <a:p>
-            <a:pPr>
+            <a:pPr lvl="0" marL="457200" indent="-228600">
+              <a:buFont typeface="Calibri"/>
               <a:spcAft>
                 <a:spcPts val="1000"/>
               </a:spcAft>
+              <a:buSzPct val="100000"/>
               <a:buChar char="•"/>
               <a:lnSpc>
                 <a:spcPts val="2200"/>
@@ -5754,10 +5788,12 @@
           </a:bodyPr>
           <a:lstStyle/>
           <a:p>
-            <a:pPr>
+            <a:pPr lvl="0" marL="457200" indent="-228600">
+              <a:buFont typeface="Calibri"/>
               <a:spcAft>
                 <a:spcPts val="1000"/>
               </a:spcAft>
+              <a:buSzPct val="100000"/>
               <a:buChar char="•"/>
               <a:lnSpc>
                 <a:spcPts val="2200"/>
@@ -5774,10 +5810,12 @@
             </a:r>
           </a:p>
           <a:p>
-            <a:pPr>
+            <a:pPr lvl="0" marL="457200" indent="-228600">
+              <a:buFont typeface="Calibri"/>
               <a:spcAft>
                 <a:spcPts val="1000"/>
               </a:spcAft>
+              <a:buSzPct val="100000"/>
               <a:buChar char="•"/>
               <a:lnSpc>
                 <a:spcPts val="2200"/>
@@ -5794,10 +5832,12 @@
             </a:r>
           </a:p>
           <a:p>
-            <a:pPr>
+            <a:pPr lvl="0" marL="457200" indent="-228600">
+              <a:buFont typeface="Calibri"/>
               <a:spcAft>
                 <a:spcPts val="1000"/>
               </a:spcAft>
+              <a:buSzPct val="100000"/>
               <a:buChar char="•"/>
               <a:lnSpc>
                 <a:spcPts val="2200"/>
@@ -5933,10 +5973,12 @@
           </a:bodyPr>
           <a:lstStyle/>
           <a:p>
-            <a:pPr>
+            <a:pPr lvl="0" marL="457200" indent="-228600">
+              <a:buFont typeface="Calibri"/>
               <a:spcAft>
                 <a:spcPts val="1000"/>
               </a:spcAft>
+              <a:buSzPct val="100000"/>
               <a:buChar char="•"/>
               <a:lnSpc>
                 <a:spcPts val="2200"/>
@@ -5953,10 +5995,12 @@
             </a:r>
           </a:p>
           <a:p>
-            <a:pPr>
+            <a:pPr lvl="0" marL="457200" indent="-228600">
+              <a:buFont typeface="Calibri"/>
               <a:spcAft>
                 <a:spcPts val="1000"/>
               </a:spcAft>
+              <a:buSzPct val="100000"/>
               <a:buChar char="•"/>
               <a:lnSpc>
                 <a:spcPts val="2200"/>
@@ -5973,10 +6017,12 @@
             </a:r>
           </a:p>
           <a:p>
-            <a:pPr>
+            <a:pPr lvl="0" marL="457200" indent="-228600">
+              <a:buFont typeface="Calibri"/>
               <a:spcAft>
                 <a:spcPts val="1000"/>
               </a:spcAft>
+              <a:buSzPct val="100000"/>
               <a:buChar char="•"/>
               <a:lnSpc>
                 <a:spcPts val="2200"/>
